--- a/dist/초4/과학/기후와생활/초4_과학_기후와생활_01_기후변화와생활.pptx
+++ b/dist/초4/과학/기후와생활/초4_과학_기후와생활_01_기후변화와생활.pptx
@@ -124,13 +124,13 @@
   <p:extLst>
     <p:ext uri="{521415D9-36F7-43E2-AB2F-B90AF26B5E84}">
       <p14:sectionLst xmlns:p14="http://schemas.microsoft.com/office/powerpoint/2010/main">
-        <p14:section name="도입" id="{54ef82b7-684d-f550-88f4-ccdd5001c042}">
+        <p14:section name="도입" id="{9b457add-d70b-488d-cc19-fc62f78bd321}">
           <p14:sldIdLst>
             <p14:sldId id="256"/>
             <p14:sldId id="257"/>
           </p14:sldIdLst>
         </p14:section>
-        <p14:section name="개념" id="{b124431b-36eb-d5d4-1e18-264571496223}">
+        <p14:section name="개념" id="{eef1a6cb-fcc4-d549-bf29-e9e2b4eea60b}">
           <p14:sldIdLst>
             <p14:sldId id="258"/>
             <p14:sldId id="261"/>
@@ -138,7 +138,7 @@
             <p14:sldId id="267"/>
           </p14:sldIdLst>
         </p14:section>
-        <p14:section name="연습" id="{06956873-843b-43ff-574c-d6154623680f}">
+        <p14:section name="연습" id="{db689d38-0d7e-8467-cebe-cc816298cfba}">
           <p14:sldIdLst>
             <p14:sldId id="259"/>
             <p14:sldId id="260"/>
@@ -149,31 +149,31 @@
             <p14:sldId id="268"/>
           </p14:sldIdLst>
         </p14:section>
-        <p14:section name="개념" id="{aa2ad990-f548-870f-34de-1bee92079c17}">
+        <p14:section name="개념" id="{f9bc604e-35cf-2fd2-1cb0-a9df680443bc}">
           <p14:sldIdLst/>
         </p14:section>
-        <p14:section name="연습" id="{a762e0bf-d491-c52e-ae52-910dc297cf29}">
+        <p14:section name="연습" id="{4e39b3d3-8e16-4bc4-36e9-2ee1737cd8b7}">
           <p14:sldIdLst/>
         </p14:section>
-        <p14:section name="개념" id="{ed979639-8200-1d19-0273-d98336a54c89}">
+        <p14:section name="개념" id="{e86ff728-ef97-6346-8050-b22313390d7e}">
           <p14:sldIdLst/>
         </p14:section>
-        <p14:section name="연습" id="{7a938aba-aa20-3e79-956d-d2bf00fed6dc}">
+        <p14:section name="연습" id="{96e55c05-5ac7-ce16-7a17-3138f7d0df61}">
           <p14:sldIdLst/>
         </p14:section>
-        <p14:section name="확인" id="{d1f90626-7b0f-d0f6-3c01-f2312842ebad}">
+        <p14:section name="확인" id="{d4fbe643-7043-4efd-4edf-86ad059b0dbd}">
           <p14:sldIdLst>
             <p14:sldId id="269"/>
             <p14:sldId id="270"/>
             <p14:sldId id="271"/>
           </p14:sldIdLst>
         </p14:section>
-        <p14:section name="정리" id="{c0fbf21e-d9a4-f840-8adf-cc4113d6d08e}">
+        <p14:section name="정리" id="{9e01a9df-b80b-87db-5030-5615460ad0ec}">
           <p14:sldIdLst>
             <p14:sldId id="272"/>
           </p14:sldIdLst>
         </p14:section>
-        <p14:section name="보충" id="{aeb595f7-7905-cdd2-40f4-cd83a0df2f44}">
+        <p14:section name="보충" id="{9c4a0d77-4e69-9c4d-1975-95096076ca99}">
           <p14:sldIdLst>
             <p14:sldId id="273"/>
           </p14:sldIdLst>
